--- a/test-corpus/word-verification/kanban.pptx
+++ b/test-corpus/word-verification/kanban.pptx
@@ -144,8 +144,8 @@
         </p:nvSpPr>
         <p:spPr>
           <a:xfrm>
-            <a:off x="662558" y="2581000"/>
-            <a:ext cx="1711320" cy="2267499"/>
+            <a:off x="585299" y="3007535"/>
+            <a:ext cx="1067494" cy="1414429"/>
           </a:xfrm>
           <a:prstGeom prst="rect">
             <a:avLst/>
@@ -166,8 +166,8 @@
         </p:nvSpPr>
         <p:spPr>
           <a:xfrm>
-            <a:off x="662558" y="2581000"/>
-            <a:ext cx="1711320" cy="316594"/>
+            <a:off x="585299" y="3007535"/>
+            <a:ext cx="1067494" cy="197486"/>
           </a:xfrm>
           <a:prstGeom prst="rect">
             <a:avLst/>
@@ -192,7 +192,7 @@
               </a:spcAft>
             </a:pPr>
             <a:r>
-              <a:rPr lang="en-US" b="1" sz="1000" dirty="0">
+              <a:rPr lang="en-US" b="1" sz="600" dirty="0">
                 <a:solidFill>
                   <a:srgbClr val="FFFFFF"/>
                 </a:solidFill>
@@ -210,8 +210,8 @@
         </p:nvSpPr>
         <p:spPr>
           <a:xfrm>
-            <a:off x="696785" y="2966047"/>
-            <a:ext cx="1642867" cy="462056"/>
+            <a:off x="606649" y="3247721"/>
+            <a:ext cx="1024794" cy="288223"/>
           </a:xfrm>
           <a:prstGeom prst="rect">
             <a:avLst/>
@@ -219,14 +219,14 @@
           <a:solidFill>
             <a:srgbClr val="FFFFFF"/>
           </a:solidFill>
-          <a:ln w="8557">
+          <a:ln w="5337">
             <a:solidFill>
               <a:srgbClr val="BFBFBF"/>
             </a:solidFill>
           </a:ln>
         </p:spPr>
         <p:txBody>
-          <a:bodyPr wrap="square" lIns="68453" tIns="0" rIns="68453" bIns="0" anchor="ctr"/>
+          <a:bodyPr wrap="square" lIns="42700" tIns="0" rIns="42700" bIns="0" anchor="ctr"/>
           <a:lstStyle/>
           <a:p>
             <a:pPr algn="l">
@@ -238,7 +238,7 @@
               </a:spcAft>
             </a:pPr>
             <a:r>
-              <a:rPr lang="en-US" sz="1000" dirty="0">
+              <a:rPr lang="en-US" sz="600" dirty="0">
                 <a:solidFill>
                   <a:srgbClr val="000000"/>
                 </a:solidFill>
@@ -256,7 +256,7 @@
               </a:spcAft>
             </a:pPr>
             <a:r>
-              <a:rPr lang="en-US" sz="1000" dirty="0">
+              <a:rPr lang="en-US" sz="600" dirty="0">
                 <a:solidFill>
                   <a:srgbClr val="000000"/>
                 </a:solidFill>
@@ -274,8 +274,8 @@
         </p:nvSpPr>
         <p:spPr>
           <a:xfrm>
-            <a:off x="696785" y="3496557"/>
-            <a:ext cx="1642867" cy="462056"/>
+            <a:off x="606649" y="3578644"/>
+            <a:ext cx="1024794" cy="288223"/>
           </a:xfrm>
           <a:prstGeom prst="rect">
             <a:avLst/>
@@ -283,14 +283,14 @@
           <a:solidFill>
             <a:srgbClr val="FFFFFF"/>
           </a:solidFill>
-          <a:ln w="8557">
+          <a:ln w="5337">
             <a:solidFill>
               <a:srgbClr val="BFBFBF"/>
             </a:solidFill>
           </a:ln>
         </p:spPr>
         <p:txBody>
-          <a:bodyPr wrap="square" lIns="68453" tIns="0" rIns="68453" bIns="0" anchor="ctr"/>
+          <a:bodyPr wrap="square" lIns="42700" tIns="0" rIns="42700" bIns="0" anchor="ctr"/>
           <a:lstStyle/>
           <a:p>
             <a:pPr algn="l">
@@ -302,7 +302,7 @@
               </a:spcAft>
             </a:pPr>
             <a:r>
-              <a:rPr lang="en-US" sz="1000" dirty="0">
+              <a:rPr lang="en-US" sz="600" dirty="0">
                 <a:solidFill>
                   <a:srgbClr val="000000"/>
                 </a:solidFill>
@@ -320,7 +320,7 @@
               </a:spcAft>
             </a:pPr>
             <a:r>
-              <a:rPr lang="en-US" sz="1000" dirty="0">
+              <a:rPr lang="en-US" sz="600" dirty="0">
                 <a:solidFill>
                   <a:srgbClr val="000000"/>
                 </a:solidFill>
@@ -338,8 +338,8 @@
         </p:nvSpPr>
         <p:spPr>
           <a:xfrm>
-            <a:off x="2493671" y="2581000"/>
-            <a:ext cx="1711320" cy="2267499"/>
+            <a:off x="1727518" y="3007535"/>
+            <a:ext cx="1067494" cy="1414429"/>
           </a:xfrm>
           <a:prstGeom prst="rect">
             <a:avLst/>
@@ -360,8 +360,8 @@
         </p:nvSpPr>
         <p:spPr>
           <a:xfrm>
-            <a:off x="2493671" y="2581000"/>
-            <a:ext cx="1711320" cy="316594"/>
+            <a:off x="1727518" y="3007535"/>
+            <a:ext cx="1067494" cy="197486"/>
           </a:xfrm>
           <a:prstGeom prst="rect">
             <a:avLst/>
@@ -386,7 +386,7 @@
               </a:spcAft>
             </a:pPr>
             <a:r>
-              <a:rPr lang="en-US" b="1" sz="1000" dirty="0">
+              <a:rPr lang="en-US" b="1" sz="600" dirty="0">
                 <a:solidFill>
                   <a:srgbClr val="FFFFFF"/>
                 </a:solidFill>
@@ -404,8 +404,8 @@
         </p:nvSpPr>
         <p:spPr>
           <a:xfrm>
-            <a:off x="2527897" y="2966047"/>
-            <a:ext cx="1642867" cy="1334830"/>
+            <a:off x="1748867" y="3247721"/>
+            <a:ext cx="1024794" cy="832645"/>
           </a:xfrm>
           <a:prstGeom prst="rect">
             <a:avLst/>
@@ -413,14 +413,14 @@
           <a:solidFill>
             <a:srgbClr val="FFFFFF"/>
           </a:solidFill>
-          <a:ln w="8557">
+          <a:ln w="5337">
             <a:solidFill>
               <a:srgbClr val="BFBFBF"/>
             </a:solidFill>
           </a:ln>
         </p:spPr>
         <p:txBody>
-          <a:bodyPr wrap="square" lIns="68453" tIns="0" rIns="68453" bIns="0" anchor="ctr"/>
+          <a:bodyPr wrap="square" lIns="42700" tIns="0" rIns="42700" bIns="0" anchor="ctr"/>
           <a:lstStyle/>
           <a:p>
             <a:pPr algn="l">
@@ -432,7 +432,7 @@
               </a:spcAft>
             </a:pPr>
             <a:r>
-              <a:rPr lang="en-US" sz="1000" dirty="0">
+              <a:rPr lang="en-US" sz="600" dirty="0">
                 <a:solidFill>
                   <a:srgbClr val="000000"/>
                 </a:solidFill>
@@ -450,7 +450,7 @@
               </a:spcAft>
             </a:pPr>
             <a:r>
-              <a:rPr lang="en-US" sz="1000" dirty="0">
+              <a:rPr lang="en-US" sz="600" dirty="0">
                 <a:solidFill>
                   <a:srgbClr val="000000"/>
                 </a:solidFill>
@@ -468,7 +468,7 @@
               </a:spcAft>
             </a:pPr>
             <a:r>
-              <a:rPr lang="en-US" sz="1000" dirty="0">
+              <a:rPr lang="en-US" sz="600" dirty="0">
                 <a:solidFill>
                   <a:srgbClr val="000000"/>
                 </a:solidFill>
@@ -486,7 +486,7 @@
               </a:spcAft>
             </a:pPr>
             <a:r>
-              <a:rPr lang="en-US" sz="1000" dirty="0">
+              <a:rPr lang="en-US" sz="600" dirty="0">
                 <a:solidFill>
                   <a:srgbClr val="000000"/>
                 </a:solidFill>
@@ -504,7 +504,7 @@
               </a:spcAft>
             </a:pPr>
             <a:r>
-              <a:rPr lang="en-US" sz="1000" dirty="0">
+              <a:rPr lang="en-US" sz="600" dirty="0">
                 <a:solidFill>
                   <a:srgbClr val="000000"/>
                 </a:solidFill>
@@ -522,7 +522,7 @@
               </a:spcAft>
             </a:pPr>
             <a:r>
-              <a:rPr lang="en-US" sz="1000" dirty="0">
+              <a:rPr lang="en-US" sz="600" dirty="0">
                 <a:solidFill>
                   <a:srgbClr val="000000"/>
                 </a:solidFill>
@@ -540,7 +540,7 @@
               </a:spcAft>
             </a:pPr>
             <a:r>
-              <a:rPr lang="en-US" sz="1000" dirty="0">
+              <a:rPr lang="en-US" sz="600" dirty="0">
                 <a:solidFill>
                   <a:srgbClr val="000000"/>
                 </a:solidFill>
@@ -558,7 +558,7 @@
               </a:spcAft>
             </a:pPr>
             <a:r>
-              <a:rPr lang="en-US" sz="1000" dirty="0">
+              <a:rPr lang="en-US" sz="600" dirty="0">
                 <a:solidFill>
                   <a:srgbClr val="000000"/>
                 </a:solidFill>
@@ -576,8 +576,8 @@
         </p:nvSpPr>
         <p:spPr>
           <a:xfrm>
-            <a:off x="4324784" y="2581000"/>
-            <a:ext cx="1711320" cy="2267499"/>
+            <a:off x="2869736" y="3007535"/>
+            <a:ext cx="1067494" cy="1414429"/>
           </a:xfrm>
           <a:prstGeom prst="rect">
             <a:avLst/>
@@ -598,8 +598,8 @@
         </p:nvSpPr>
         <p:spPr>
           <a:xfrm>
-            <a:off x="4324784" y="2581000"/>
-            <a:ext cx="1711320" cy="316594"/>
+            <a:off x="2869736" y="3007535"/>
+            <a:ext cx="1067494" cy="197486"/>
           </a:xfrm>
           <a:prstGeom prst="rect">
             <a:avLst/>
@@ -624,7 +624,7 @@
               </a:spcAft>
             </a:pPr>
             <a:r>
-              <a:rPr lang="en-US" b="1" sz="1000" dirty="0">
+              <a:rPr lang="en-US" b="1" sz="600" dirty="0">
                 <a:solidFill>
                   <a:srgbClr val="FFFFFF"/>
                 </a:solidFill>
@@ -642,8 +642,8 @@
         </p:nvSpPr>
         <p:spPr>
           <a:xfrm>
-            <a:off x="4359010" y="2966047"/>
-            <a:ext cx="1642867" cy="462056"/>
+            <a:off x="2891086" y="3247721"/>
+            <a:ext cx="1024794" cy="288223"/>
           </a:xfrm>
           <a:prstGeom prst="rect">
             <a:avLst/>
@@ -651,14 +651,14 @@
           <a:solidFill>
             <a:srgbClr val="FFFFFF"/>
           </a:solidFill>
-          <a:ln w="8557">
+          <a:ln w="5337">
             <a:solidFill>
               <a:srgbClr val="BFBFBF"/>
             </a:solidFill>
           </a:ln>
         </p:spPr>
         <p:txBody>
-          <a:bodyPr wrap="square" lIns="68453" tIns="0" rIns="68453" bIns="0" anchor="ctr"/>
+          <a:bodyPr wrap="square" lIns="42700" tIns="0" rIns="42700" bIns="0" anchor="ctr"/>
           <a:lstStyle/>
           <a:p>
             <a:pPr algn="l">
@@ -670,7 +670,7 @@
               </a:spcAft>
             </a:pPr>
             <a:r>
-              <a:rPr lang="en-US" sz="1000" dirty="0">
+              <a:rPr lang="en-US" sz="600" dirty="0">
                 <a:solidFill>
                   <a:srgbClr val="000000"/>
                 </a:solidFill>
@@ -688,7 +688,7 @@
               </a:spcAft>
             </a:pPr>
             <a:r>
-              <a:rPr lang="en-US" sz="1000" dirty="0">
+              <a:rPr lang="en-US" sz="600" dirty="0">
                 <a:solidFill>
                   <a:srgbClr val="000000"/>
                 </a:solidFill>
@@ -706,8 +706,8 @@
         </p:nvSpPr>
         <p:spPr>
           <a:xfrm>
-            <a:off x="6155896" y="2581000"/>
-            <a:ext cx="1711320" cy="2267499"/>
+            <a:off x="4011954" y="3007535"/>
+            <a:ext cx="1067494" cy="1414429"/>
           </a:xfrm>
           <a:prstGeom prst="rect">
             <a:avLst/>
@@ -728,8 +728,8 @@
         </p:nvSpPr>
         <p:spPr>
           <a:xfrm>
-            <a:off x="6155896" y="2581000"/>
-            <a:ext cx="1711320" cy="316594"/>
+            <a:off x="4011954" y="3007535"/>
+            <a:ext cx="1067494" cy="197486"/>
           </a:xfrm>
           <a:prstGeom prst="rect">
             <a:avLst/>
@@ -754,7 +754,7 @@
               </a:spcAft>
             </a:pPr>
             <a:r>
-              <a:rPr lang="en-US" b="1" sz="1000" dirty="0">
+              <a:rPr lang="en-US" b="1" sz="600" dirty="0">
                 <a:solidFill>
                   <a:srgbClr val="FFFFFF"/>
                 </a:solidFill>
@@ -772,8 +772,8 @@
         </p:nvSpPr>
         <p:spPr>
           <a:xfrm>
-            <a:off x="6190123" y="2966047"/>
-            <a:ext cx="1642867" cy="462056"/>
+            <a:off x="4033304" y="3247721"/>
+            <a:ext cx="1024794" cy="288223"/>
           </a:xfrm>
           <a:prstGeom prst="rect">
             <a:avLst/>
@@ -781,14 +781,14 @@
           <a:solidFill>
             <a:srgbClr val="FFFFFF"/>
           </a:solidFill>
-          <a:ln w="8557">
+          <a:ln w="5337">
             <a:solidFill>
               <a:srgbClr val="BFBFBF"/>
             </a:solidFill>
           </a:ln>
         </p:spPr>
         <p:txBody>
-          <a:bodyPr wrap="square" lIns="68453" tIns="0" rIns="68453" bIns="0" anchor="ctr"/>
+          <a:bodyPr wrap="square" lIns="42700" tIns="0" rIns="42700" bIns="0" anchor="ctr"/>
           <a:lstStyle/>
           <a:p>
             <a:pPr algn="l">
@@ -800,7 +800,7 @@
               </a:spcAft>
             </a:pPr>
             <a:r>
-              <a:rPr lang="en-US" sz="1000" dirty="0">
+              <a:rPr lang="en-US" sz="600" dirty="0">
                 <a:solidFill>
                   <a:srgbClr val="000000"/>
                 </a:solidFill>
@@ -818,7 +818,7 @@
               </a:spcAft>
             </a:pPr>
             <a:r>
-              <a:rPr lang="en-US" sz="1000" dirty="0">
+              <a:rPr lang="en-US" sz="600" dirty="0">
                 <a:solidFill>
                   <a:srgbClr val="000000"/>
                 </a:solidFill>
@@ -836,8 +836,8 @@
         </p:nvSpPr>
         <p:spPr>
           <a:xfrm>
-            <a:off x="6190123" y="2966047"/>
-            <a:ext cx="42783" cy="462056"/>
+            <a:off x="4033304" y="3247721"/>
+            <a:ext cx="26687" cy="288223"/>
           </a:xfrm>
           <a:prstGeom prst="rect">
             <a:avLst/>
@@ -858,8 +858,8 @@
         </p:nvSpPr>
         <p:spPr>
           <a:xfrm>
-            <a:off x="6190123" y="3496557"/>
-            <a:ext cx="1642867" cy="462056"/>
+            <a:off x="4033304" y="3578644"/>
+            <a:ext cx="1024794" cy="288223"/>
           </a:xfrm>
           <a:prstGeom prst="rect">
             <a:avLst/>
@@ -867,14 +867,14 @@
           <a:solidFill>
             <a:srgbClr val="FFFFFF"/>
           </a:solidFill>
-          <a:ln w="8557">
+          <a:ln w="5337">
             <a:solidFill>
               <a:srgbClr val="BFBFBF"/>
             </a:solidFill>
           </a:ln>
         </p:spPr>
         <p:txBody>
-          <a:bodyPr wrap="square" lIns="68453" tIns="0" rIns="68453" bIns="0" anchor="ctr"/>
+          <a:bodyPr wrap="square" lIns="42700" tIns="0" rIns="42700" bIns="0" anchor="ctr"/>
           <a:lstStyle/>
           <a:p>
             <a:pPr algn="l">
@@ -886,7 +886,7 @@
               </a:spcAft>
             </a:pPr>
             <a:r>
-              <a:rPr lang="en-US" sz="1000" dirty="0">
+              <a:rPr lang="en-US" sz="600" dirty="0">
                 <a:solidFill>
                   <a:srgbClr val="000000"/>
                 </a:solidFill>
@@ -904,7 +904,7 @@
               </a:spcAft>
             </a:pPr>
             <a:r>
-              <a:rPr lang="en-US" sz="1000" dirty="0">
+              <a:rPr lang="en-US" sz="600" dirty="0">
                 <a:solidFill>
                   <a:srgbClr val="000000"/>
                 </a:solidFill>
@@ -922,8 +922,8 @@
         </p:nvSpPr>
         <p:spPr>
           <a:xfrm>
-            <a:off x="6190123" y="3496557"/>
-            <a:ext cx="42783" cy="462056"/>
+            <a:off x="4033304" y="3578644"/>
+            <a:ext cx="26687" cy="288223"/>
           </a:xfrm>
           <a:prstGeom prst="rect">
             <a:avLst/>
@@ -944,8 +944,8 @@
         </p:nvSpPr>
         <p:spPr>
           <a:xfrm>
-            <a:off x="7987009" y="2581000"/>
-            <a:ext cx="1711320" cy="2267499"/>
+            <a:off x="5154173" y="3007535"/>
+            <a:ext cx="1067494" cy="1414429"/>
           </a:xfrm>
           <a:prstGeom prst="rect">
             <a:avLst/>
@@ -966,8 +966,8 @@
         </p:nvSpPr>
         <p:spPr>
           <a:xfrm>
-            <a:off x="7987009" y="2581000"/>
-            <a:ext cx="1711320" cy="316594"/>
+            <a:off x="5154173" y="3007535"/>
+            <a:ext cx="1067494" cy="197486"/>
           </a:xfrm>
           <a:prstGeom prst="rect">
             <a:avLst/>
@@ -992,7 +992,7 @@
               </a:spcAft>
             </a:pPr>
             <a:r>
-              <a:rPr lang="en-US" b="1" sz="1000" dirty="0">
+              <a:rPr lang="en-US" b="1" sz="600" dirty="0">
                 <a:solidFill>
                   <a:srgbClr val="FFFFFF"/>
                 </a:solidFill>
@@ -1010,8 +1010,8 @@
         </p:nvSpPr>
         <p:spPr>
           <a:xfrm>
-            <a:off x="8021235" y="2966047"/>
-            <a:ext cx="1642867" cy="316594"/>
+            <a:off x="5175523" y="3247721"/>
+            <a:ext cx="1024794" cy="197486"/>
           </a:xfrm>
           <a:prstGeom prst="rect">
             <a:avLst/>
@@ -1019,14 +1019,14 @@
           <a:solidFill>
             <a:srgbClr val="FFFFFF"/>
           </a:solidFill>
-          <a:ln w="8557">
+          <a:ln w="5337">
             <a:solidFill>
               <a:srgbClr val="BFBFBF"/>
             </a:solidFill>
           </a:ln>
         </p:spPr>
         <p:txBody>
-          <a:bodyPr wrap="square" lIns="68453" tIns="0" rIns="68453" bIns="0" anchor="ctr"/>
+          <a:bodyPr wrap="square" lIns="42700" tIns="0" rIns="42700" bIns="0" anchor="ctr"/>
           <a:lstStyle/>
           <a:p>
             <a:pPr algn="l">
@@ -1038,7 +1038,7 @@
               </a:spcAft>
             </a:pPr>
             <a:r>
-              <a:rPr lang="en-US" sz="1000" dirty="0">
+              <a:rPr lang="en-US" sz="600" dirty="0">
                 <a:solidFill>
                   <a:srgbClr val="000000"/>
                 </a:solidFill>
@@ -1056,8 +1056,8 @@
         </p:nvSpPr>
         <p:spPr>
           <a:xfrm>
-            <a:off x="8021235" y="3351095"/>
-            <a:ext cx="1642867" cy="898443"/>
+            <a:off x="5175523" y="3487907"/>
+            <a:ext cx="1024794" cy="560434"/>
           </a:xfrm>
           <a:prstGeom prst="rect">
             <a:avLst/>
@@ -1065,14 +1065,14 @@
           <a:solidFill>
             <a:srgbClr val="FFFFFF"/>
           </a:solidFill>
-          <a:ln w="8557">
+          <a:ln w="5337">
             <a:solidFill>
               <a:srgbClr val="BFBFBF"/>
             </a:solidFill>
           </a:ln>
         </p:spPr>
         <p:txBody>
-          <a:bodyPr wrap="square" lIns="68453" tIns="0" rIns="68453" bIns="0" anchor="ctr"/>
+          <a:bodyPr wrap="square" lIns="42700" tIns="0" rIns="42700" bIns="0" anchor="ctr"/>
           <a:lstStyle/>
           <a:p>
             <a:pPr algn="l">
@@ -1084,7 +1084,7 @@
               </a:spcAft>
             </a:pPr>
             <a:r>
-              <a:rPr lang="en-US" sz="1000" dirty="0">
+              <a:rPr lang="en-US" sz="600" dirty="0">
                 <a:solidFill>
                   <a:srgbClr val="000000"/>
                 </a:solidFill>
@@ -1102,7 +1102,7 @@
               </a:spcAft>
             </a:pPr>
             <a:r>
-              <a:rPr lang="en-US" sz="1000" dirty="0">
+              <a:rPr lang="en-US" sz="600" dirty="0">
                 <a:solidFill>
                   <a:srgbClr val="000000"/>
                 </a:solidFill>
@@ -1120,7 +1120,7 @@
               </a:spcAft>
             </a:pPr>
             <a:r>
-              <a:rPr lang="en-US" sz="1000" dirty="0">
+              <a:rPr lang="en-US" sz="600" dirty="0">
                 <a:solidFill>
                   <a:srgbClr val="000000"/>
                 </a:solidFill>
@@ -1138,7 +1138,7 @@
               </a:spcAft>
             </a:pPr>
             <a:r>
-              <a:rPr lang="en-US" sz="1000" dirty="0">
+              <a:rPr lang="en-US" sz="600" dirty="0">
                 <a:solidFill>
                   <a:srgbClr val="000000"/>
                 </a:solidFill>
@@ -1156,7 +1156,7 @@
               </a:spcAft>
             </a:pPr>
             <a:r>
-              <a:rPr lang="en-US" sz="1000" dirty="0">
+              <a:rPr lang="en-US" sz="600" dirty="0">
                 <a:solidFill>
                   <a:srgbClr val="000000"/>
                 </a:solidFill>
@@ -1174,8 +1174,8 @@
         </p:nvSpPr>
         <p:spPr>
           <a:xfrm>
-            <a:off x="8021235" y="3351095"/>
-            <a:ext cx="42783" cy="898443"/>
+            <a:off x="5175523" y="3487907"/>
+            <a:ext cx="26687" cy="560434"/>
           </a:xfrm>
           <a:prstGeom prst="rect">
             <a:avLst/>
@@ -1196,8 +1196,8 @@
         </p:nvSpPr>
         <p:spPr>
           <a:xfrm>
-            <a:off x="8021235" y="4317990"/>
-            <a:ext cx="1642867" cy="462056"/>
+            <a:off x="5175523" y="4091041"/>
+            <a:ext cx="1024794" cy="288223"/>
           </a:xfrm>
           <a:prstGeom prst="rect">
             <a:avLst/>
@@ -1205,14 +1205,14 @@
           <a:solidFill>
             <a:srgbClr val="FFFFFF"/>
           </a:solidFill>
-          <a:ln w="8557">
+          <a:ln w="5337">
             <a:solidFill>
               <a:srgbClr val="BFBFBF"/>
             </a:solidFill>
           </a:ln>
         </p:spPr>
         <p:txBody>
-          <a:bodyPr wrap="square" lIns="68453" tIns="0" rIns="68453" bIns="0" anchor="ctr"/>
+          <a:bodyPr wrap="square" lIns="42700" tIns="0" rIns="42700" bIns="0" anchor="ctr"/>
           <a:lstStyle/>
           <a:p>
             <a:pPr algn="l">
@@ -1224,7 +1224,7 @@
               </a:spcAft>
             </a:pPr>
             <a:r>
-              <a:rPr lang="en-US" sz="1000" dirty="0">
+              <a:rPr lang="en-US" sz="600" dirty="0">
                 <a:solidFill>
                   <a:srgbClr val="000000"/>
                 </a:solidFill>
@@ -1242,7 +1242,7 @@
               </a:spcAft>
             </a:pPr>
             <a:r>
-              <a:rPr lang="en-US" sz="1000" dirty="0">
+              <a:rPr lang="en-US" sz="600" dirty="0">
                 <a:solidFill>
                   <a:srgbClr val="000000"/>
                 </a:solidFill>
@@ -1260,8 +1260,8 @@
         </p:nvSpPr>
         <p:spPr>
           <a:xfrm>
-            <a:off x="8021235" y="4317990"/>
-            <a:ext cx="42783" cy="462056"/>
+            <a:off x="5175523" y="4091041"/>
+            <a:ext cx="26687" cy="288223"/>
           </a:xfrm>
           <a:prstGeom prst="rect">
             <a:avLst/>
@@ -1282,8 +1282,8 @@
         </p:nvSpPr>
         <p:spPr>
           <a:xfrm>
-            <a:off x="9818121" y="2581000"/>
-            <a:ext cx="1711320" cy="2267499"/>
+            <a:off x="6296391" y="3007535"/>
+            <a:ext cx="1067494" cy="1414429"/>
           </a:xfrm>
           <a:prstGeom prst="rect">
             <a:avLst/>
@@ -1304,8 +1304,8 @@
         </p:nvSpPr>
         <p:spPr>
           <a:xfrm>
-            <a:off x="9818121" y="2581000"/>
-            <a:ext cx="1711320" cy="316594"/>
+            <a:off x="6296391" y="3007535"/>
+            <a:ext cx="1067494" cy="197486"/>
           </a:xfrm>
           <a:prstGeom prst="rect">
             <a:avLst/>
@@ -1330,7 +1330,7 @@
               </a:spcAft>
             </a:pPr>
             <a:r>
-              <a:rPr lang="en-US" b="1" sz="1000" dirty="0">
+              <a:rPr lang="en-US" b="1" sz="600" dirty="0">
                 <a:solidFill>
                   <a:srgbClr val="FFFFFF"/>
                 </a:solidFill>
@@ -1348,8 +1348,8 @@
         </p:nvSpPr>
         <p:spPr>
           <a:xfrm>
-            <a:off x="9852348" y="2966047"/>
-            <a:ext cx="1642867" cy="462056"/>
+            <a:off x="6317741" y="3247721"/>
+            <a:ext cx="1024794" cy="288223"/>
           </a:xfrm>
           <a:prstGeom prst="rect">
             <a:avLst/>
@@ -1357,14 +1357,14 @@
           <a:solidFill>
             <a:srgbClr val="FFFFFF"/>
           </a:solidFill>
-          <a:ln w="8557">
+          <a:ln w="5337">
             <a:solidFill>
               <a:srgbClr val="BFBFBF"/>
             </a:solidFill>
           </a:ln>
         </p:spPr>
         <p:txBody>
-          <a:bodyPr wrap="square" lIns="68453" tIns="0" rIns="68453" bIns="0" anchor="ctr"/>
+          <a:bodyPr wrap="square" lIns="42700" tIns="0" rIns="42700" bIns="0" anchor="ctr"/>
           <a:lstStyle/>
           <a:p>
             <a:pPr algn="l">
@@ -1376,7 +1376,7 @@
               </a:spcAft>
             </a:pPr>
             <a:r>
-              <a:rPr lang="en-US" sz="1000" dirty="0">
+              <a:rPr lang="en-US" sz="600" dirty="0">
                 <a:solidFill>
                   <a:srgbClr val="000000"/>
                 </a:solidFill>
@@ -1394,12 +1394,266 @@
               </a:spcAft>
             </a:pPr>
             <a:r>
-              <a:rPr lang="en-US" sz="1000" dirty="0">
+              <a:rPr lang="en-US" sz="600" dirty="0">
                 <a:solidFill>
                   <a:srgbClr val="000000"/>
                 </a:solidFill>
               </a:rPr>
               <a:t>Firefox</a:t>
+            </a:r>
+          </a:p>
+        </p:txBody>
+      </p:sp>
+      <p:sp>
+        <p:nvSpPr>
+          <p:cNvPr id="4" name="Mermaid source"/>
+          <p:cNvSpPr/>
+          <p:nvPr/>
+        </p:nvSpPr>
+        <p:spPr>
+          <a:xfrm>
+            <a:off x="7674864" y="1028700"/>
+            <a:ext cx="4059936" cy="5372100"/>
+          </a:xfrm>
+          <a:prstGeom prst="rect">
+            <a:avLst/>
+          </a:prstGeom>
+          <a:solidFill>
+            <a:srgbClr val="F3F4F6"/>
+          </a:solidFill>
+          <a:ln w="9525">
+            <a:solidFill>
+              <a:srgbClr val="D1D5DB"/>
+            </a:solidFill>
+          </a:ln>
+        </p:spPr>
+        <p:txBody>
+          <a:bodyPr wrap="square" lIns="91440" tIns="45720" rIns="91440" bIns="45720" anchor="t">
+            <a:noAutofit/>
+          </a:bodyPr>
+          <a:lstStyle/>
+          <a:p>
+            <a:pPr algn="l"/>
+            <a:r>
+              <a:rPr lang="en-US" sz="1150" dirty="0">
+                <a:solidFill>
+                  <a:srgbClr val="1F2937"/>
+                </a:solidFill>
+                <a:latin typeface="Consolas"/>
+                <a:cs typeface="Consolas"/>
+              </a:rPr>
+              <a:t>kanban</a:t>
+            </a:r>
+          </a:p>
+          <a:p>
+            <a:pPr algn="l"/>
+            <a:r>
+              <a:rPr lang="en-US" sz="1150" dirty="0">
+                <a:solidFill>
+                  <a:srgbClr val="1F2937"/>
+                </a:solidFill>
+                <a:latin typeface="Consolas"/>
+                <a:cs typeface="Consolas"/>
+              </a:rPr>
+              <a:t>  Todo</a:t>
+            </a:r>
+          </a:p>
+          <a:p>
+            <a:pPr algn="l"/>
+            <a:r>
+              <a:rPr lang="en-US" sz="1150" dirty="0">
+                <a:solidFill>
+                  <a:srgbClr val="1F2937"/>
+                </a:solidFill>
+                <a:latin typeface="Consolas"/>
+                <a:cs typeface="Consolas"/>
+              </a:rPr>
+              <a:t>    [Create Documentation]</a:t>
+            </a:r>
+          </a:p>
+          <a:p>
+            <a:pPr algn="l"/>
+            <a:r>
+              <a:rPr lang="en-US" sz="1150" dirty="0">
+                <a:solidFill>
+                  <a:srgbClr val="1F2937"/>
+                </a:solidFill>
+                <a:latin typeface="Consolas"/>
+                <a:cs typeface="Consolas"/>
+              </a:rPr>
+              <a:t>    docs[Create Blog about the new diagram]</a:t>
+            </a:r>
+          </a:p>
+          <a:p>
+            <a:pPr algn="l"/>
+            <a:r>
+              <a:rPr lang="en-US" sz="1150" dirty="0">
+                <a:solidFill>
+                  <a:srgbClr val="1F2937"/>
+                </a:solidFill>
+                <a:latin typeface="Consolas"/>
+                <a:cs typeface="Consolas"/>
+              </a:rPr>
+              <a:t>  [In progress]</a:t>
+            </a:r>
+          </a:p>
+          <a:p>
+            <a:pPr algn="l"/>
+            <a:r>
+              <a:rPr lang="en-US" sz="1150" dirty="0">
+                <a:solidFill>
+                  <a:srgbClr val="1F2937"/>
+                </a:solidFill>
+                <a:latin typeface="Consolas"/>
+                <a:cs typeface="Consolas"/>
+              </a:rPr>
+              <a:t>    id6[Create renderer so that it works in all cases. We also add some extra text here for testing purposes. And some more just for the extra flare.]</a:t>
+            </a:r>
+          </a:p>
+          <a:p>
+            <a:pPr algn="l"/>
+            <a:r>
+              <a:rPr lang="en-US" sz="1150" dirty="0">
+                <a:solidFill>
+                  <a:srgbClr val="1F2937"/>
+                </a:solidFill>
+                <a:latin typeface="Consolas"/>
+                <a:cs typeface="Consolas"/>
+              </a:rPr>
+              <a:t>  id9[Ready for deploy]</a:t>
+            </a:r>
+          </a:p>
+          <a:p>
+            <a:pPr algn="l"/>
+            <a:r>
+              <a:rPr lang="en-US" sz="1150" dirty="0">
+                <a:solidFill>
+                  <a:srgbClr val="1F2937"/>
+                </a:solidFill>
+                <a:latin typeface="Consolas"/>
+                <a:cs typeface="Consolas"/>
+              </a:rPr>
+              <a:t>    id8[Design grammar]@{ assigned: 'knsv' }</a:t>
+            </a:r>
+          </a:p>
+          <a:p>
+            <a:pPr algn="l"/>
+            <a:r>
+              <a:rPr lang="en-US" sz="1150" dirty="0">
+                <a:solidFill>
+                  <a:srgbClr val="1F2937"/>
+                </a:solidFill>
+                <a:latin typeface="Consolas"/>
+                <a:cs typeface="Consolas"/>
+              </a:rPr>
+              <a:t>  id10[Ready for test]</a:t>
+            </a:r>
+          </a:p>
+          <a:p>
+            <a:pPr algn="l"/>
+            <a:r>
+              <a:rPr lang="en-US" sz="1150" dirty="0">
+                <a:solidFill>
+                  <a:srgbClr val="1F2937"/>
+                </a:solidFill>
+                <a:latin typeface="Consolas"/>
+                <a:cs typeface="Consolas"/>
+              </a:rPr>
+              <a:t>    id4[Create parsing tests]@{ ticket: MC-2038, assigned: 'K.Sveidqvist', priority: 'High' }</a:t>
+            </a:r>
+          </a:p>
+          <a:p>
+            <a:pPr algn="l"/>
+            <a:r>
+              <a:rPr lang="en-US" sz="1150" dirty="0">
+                <a:solidFill>
+                  <a:srgbClr val="1F2937"/>
+                </a:solidFill>
+                <a:latin typeface="Consolas"/>
+                <a:cs typeface="Consolas"/>
+              </a:rPr>
+              <a:t>    id66[last item]@{ priority: 'Very Low', assigned: 'knsv' }</a:t>
+            </a:r>
+          </a:p>
+          <a:p>
+            <a:pPr algn="l"/>
+            <a:r>
+              <a:rPr lang="en-US" sz="1150" dirty="0">
+                <a:solidFill>
+                  <a:srgbClr val="1F2937"/>
+                </a:solidFill>
+                <a:latin typeface="Consolas"/>
+                <a:cs typeface="Consolas"/>
+              </a:rPr>
+              <a:t>  id11[Done]</a:t>
+            </a:r>
+          </a:p>
+          <a:p>
+            <a:pPr algn="l"/>
+            <a:r>
+              <a:rPr lang="en-US" sz="1150" dirty="0">
+                <a:solidFill>
+                  <a:srgbClr val="1F2937"/>
+                </a:solidFill>
+                <a:latin typeface="Consolas"/>
+                <a:cs typeface="Consolas"/>
+              </a:rPr>
+              <a:t>    id5[define getData]</a:t>
+            </a:r>
+          </a:p>
+          <a:p>
+            <a:pPr algn="l"/>
+            <a:r>
+              <a:rPr lang="en-US" sz="1150" dirty="0">
+                <a:solidFill>
+                  <a:srgbClr val="1F2937"/>
+                </a:solidFill>
+                <a:latin typeface="Consolas"/>
+                <a:cs typeface="Consolas"/>
+              </a:rPr>
+              <a:t>    id2[Title of diagram is more than 100 chars when user duplicates diagram with 100 char]@{ ticket: MC-2036, priority: 'Very High'}</a:t>
+            </a:r>
+          </a:p>
+          <a:p>
+            <a:pPr algn="l"/>
+            <a:r>
+              <a:rPr lang="en-US" sz="1150" dirty="0">
+                <a:solidFill>
+                  <a:srgbClr val="1F2937"/>
+                </a:solidFill>
+                <a:latin typeface="Consolas"/>
+                <a:cs typeface="Consolas"/>
+              </a:rPr>
+              <a:t>    id3[Update DB function]@{ ticket: MC-2037, assigned: knsv, priority: 'High' }</a:t>
+            </a:r>
+          </a:p>
+          <a:p>
+            <a:endParaRPr lang="en-US" sz="1150" dirty="0"/>
+          </a:p>
+          <a:p>
+            <a:pPr algn="l"/>
+            <a:r>
+              <a:rPr lang="en-US" sz="1150" dirty="0">
+                <a:solidFill>
+                  <a:srgbClr val="1F2937"/>
+                </a:solidFill>
+                <a:latin typeface="Consolas"/>
+                <a:cs typeface="Consolas"/>
+              </a:rPr>
+              <a:t>  id12[Can't reproduce]</a:t>
+            </a:r>
+          </a:p>
+          <a:p>
+            <a:pPr algn="l"/>
+            <a:r>
+              <a:rPr lang="en-US" sz="1150" dirty="0">
+                <a:solidFill>
+                  <a:srgbClr val="1F2937"/>
+                </a:solidFill>
+                <a:latin typeface="Consolas"/>
+                <a:cs typeface="Consolas"/>
+              </a:rPr>
+              <a:t>    id3[Weird flickering in Firefox]</a:t>
             </a:r>
           </a:p>
         </p:txBody>
